--- a/ai_gripper/그리퍼.pptx
+++ b/ai_gripper/그리퍼.pptx
@@ -6,6 +6,10 @@
   </p:sldMasterIdLst>
   <p:sldIdLst>
     <p:sldId id="259" r:id="rId2"/>
+    <p:sldId id="260" r:id="rId3"/>
+    <p:sldId id="261" r:id="rId4"/>
+    <p:sldId id="262" r:id="rId5"/>
+    <p:sldId id="263" r:id="rId6"/>
   </p:sldIdLst>
   <p:sldSz cx="12192000" cy="6858000"/>
   <p:notesSz cx="6858000" cy="9144000"/>
@@ -2991,6 +2995,366 @@
 </p:sld>
 </file>
 
+<file path=ppt/slides/slide2.xml><?xml version="1.0" encoding="utf-8"?>
+<p:sld xmlns:a="http://schemas.openxmlformats.org/drawingml/2006/main" xmlns:r="http://schemas.openxmlformats.org/officeDocument/2006/relationships" xmlns:p="http://schemas.openxmlformats.org/presentationml/2006/main">
+  <p:cSld>
+    <p:spTree>
+      <p:nvGrpSpPr>
+        <p:cNvPr id="1" name=""/>
+        <p:cNvGrpSpPr/>
+        <p:nvPr/>
+      </p:nvGrpSpPr>
+      <p:grpSpPr>
+        <a:xfrm>
+          <a:off x="0" y="0"/>
+          <a:ext cx="0" cy="0"/>
+          <a:chOff x="0" y="0"/>
+          <a:chExt cx="0" cy="0"/>
+        </a:xfrm>
+      </p:grpSpPr>
+      <p:pic>
+        <p:nvPicPr>
+          <p:cNvPr id="3" name="그림 2">
+            <a:extLst>
+              <a:ext uri="{FF2B5EF4-FFF2-40B4-BE49-F238E27FC236}">
+                <a16:creationId xmlns:a16="http://schemas.microsoft.com/office/drawing/2014/main" id="{0700AE6D-34D9-8F8B-3CB2-23EEF51275ED}"/>
+              </a:ext>
+            </a:extLst>
+          </p:cNvPr>
+          <p:cNvPicPr>
+            <a:picLocks noChangeAspect="1"/>
+          </p:cNvPicPr>
+          <p:nvPr/>
+        </p:nvPicPr>
+        <p:blipFill>
+          <a:blip r:embed="rId2"/>
+          <a:stretch>
+            <a:fillRect/>
+          </a:stretch>
+        </p:blipFill>
+        <p:spPr>
+          <a:xfrm>
+            <a:off x="1456301" y="999255"/>
+            <a:ext cx="4925112" cy="4667901"/>
+          </a:xfrm>
+          <a:prstGeom prst="rect">
+            <a:avLst/>
+          </a:prstGeom>
+        </p:spPr>
+      </p:pic>
+      <p:pic>
+        <p:nvPicPr>
+          <p:cNvPr id="6" name="그림 5">
+            <a:extLst>
+              <a:ext uri="{FF2B5EF4-FFF2-40B4-BE49-F238E27FC236}">
+                <a16:creationId xmlns:a16="http://schemas.microsoft.com/office/drawing/2014/main" id="{4D367E34-16F9-A631-0728-23CDCB7D5E9B}"/>
+              </a:ext>
+            </a:extLst>
+          </p:cNvPr>
+          <p:cNvPicPr>
+            <a:picLocks noChangeAspect="1"/>
+          </p:cNvPicPr>
+          <p:nvPr/>
+        </p:nvPicPr>
+        <p:blipFill>
+          <a:blip r:embed="rId3"/>
+          <a:stretch>
+            <a:fillRect/>
+          </a:stretch>
+        </p:blipFill>
+        <p:spPr>
+          <a:xfrm>
+            <a:off x="6813750" y="322885"/>
+            <a:ext cx="4277322" cy="5344271"/>
+          </a:xfrm>
+          <a:prstGeom prst="rect">
+            <a:avLst/>
+          </a:prstGeom>
+        </p:spPr>
+      </p:pic>
+    </p:spTree>
+    <p:extLst>
+      <p:ext uri="{BB962C8B-B14F-4D97-AF65-F5344CB8AC3E}">
+        <p14:creationId xmlns:p14="http://schemas.microsoft.com/office/powerpoint/2010/main" val="2447143626"/>
+      </p:ext>
+    </p:extLst>
+  </p:cSld>
+  <p:clrMapOvr>
+    <a:masterClrMapping/>
+  </p:clrMapOvr>
+</p:sld>
+</file>
+
+<file path=ppt/slides/slide3.xml><?xml version="1.0" encoding="utf-8"?>
+<p:sld xmlns:a="http://schemas.openxmlformats.org/drawingml/2006/main" xmlns:r="http://schemas.openxmlformats.org/officeDocument/2006/relationships" xmlns:p="http://schemas.openxmlformats.org/presentationml/2006/main">
+  <p:cSld>
+    <p:spTree>
+      <p:nvGrpSpPr>
+        <p:cNvPr id="1" name=""/>
+        <p:cNvGrpSpPr/>
+        <p:nvPr/>
+      </p:nvGrpSpPr>
+      <p:grpSpPr>
+        <a:xfrm>
+          <a:off x="0" y="0"/>
+          <a:ext cx="0" cy="0"/>
+          <a:chOff x="0" y="0"/>
+          <a:chExt cx="0" cy="0"/>
+        </a:xfrm>
+      </p:grpSpPr>
+      <p:pic>
+        <p:nvPicPr>
+          <p:cNvPr id="4" name="그림 3">
+            <a:extLst>
+              <a:ext uri="{FF2B5EF4-FFF2-40B4-BE49-F238E27FC236}">
+                <a16:creationId xmlns:a16="http://schemas.microsoft.com/office/drawing/2014/main" id="{85395979-6E6B-FD96-F896-BECBE3B34CB7}"/>
+              </a:ext>
+            </a:extLst>
+          </p:cNvPr>
+          <p:cNvPicPr>
+            <a:picLocks noChangeAspect="1"/>
+          </p:cNvPicPr>
+          <p:nvPr/>
+        </p:nvPicPr>
+        <p:blipFill>
+          <a:blip r:embed="rId2"/>
+          <a:stretch>
+            <a:fillRect/>
+          </a:stretch>
+        </p:blipFill>
+        <p:spPr>
+          <a:xfrm>
+            <a:off x="960586" y="1101591"/>
+            <a:ext cx="5010849" cy="4515480"/>
+          </a:xfrm>
+          <a:prstGeom prst="rect">
+            <a:avLst/>
+          </a:prstGeom>
+        </p:spPr>
+      </p:pic>
+      <p:pic>
+        <p:nvPicPr>
+          <p:cNvPr id="7" name="그림 6">
+            <a:extLst>
+              <a:ext uri="{FF2B5EF4-FFF2-40B4-BE49-F238E27FC236}">
+                <a16:creationId xmlns:a16="http://schemas.microsoft.com/office/drawing/2014/main" id="{9C062B83-5680-4C9F-DCF2-9F88BA791F64}"/>
+              </a:ext>
+            </a:extLst>
+          </p:cNvPr>
+          <p:cNvPicPr>
+            <a:picLocks noChangeAspect="1"/>
+          </p:cNvPicPr>
+          <p:nvPr/>
+        </p:nvPicPr>
+        <p:blipFill>
+          <a:blip r:embed="rId3"/>
+          <a:stretch>
+            <a:fillRect/>
+          </a:stretch>
+        </p:blipFill>
+        <p:spPr>
+          <a:xfrm>
+            <a:off x="6687353" y="1188534"/>
+            <a:ext cx="4077269" cy="4620270"/>
+          </a:xfrm>
+          <a:prstGeom prst="rect">
+            <a:avLst/>
+          </a:prstGeom>
+        </p:spPr>
+      </p:pic>
+    </p:spTree>
+    <p:extLst>
+      <p:ext uri="{BB962C8B-B14F-4D97-AF65-F5344CB8AC3E}">
+        <p14:creationId xmlns:p14="http://schemas.microsoft.com/office/powerpoint/2010/main" val="169705627"/>
+      </p:ext>
+    </p:extLst>
+  </p:cSld>
+  <p:clrMapOvr>
+    <a:masterClrMapping/>
+  </p:clrMapOvr>
+</p:sld>
+</file>
+
+<file path=ppt/slides/slide4.xml><?xml version="1.0" encoding="utf-8"?>
+<p:sld xmlns:a="http://schemas.openxmlformats.org/drawingml/2006/main" xmlns:r="http://schemas.openxmlformats.org/officeDocument/2006/relationships" xmlns:p="http://schemas.openxmlformats.org/presentationml/2006/main">
+  <p:cSld>
+    <p:spTree>
+      <p:nvGrpSpPr>
+        <p:cNvPr id="1" name=""/>
+        <p:cNvGrpSpPr/>
+        <p:nvPr/>
+      </p:nvGrpSpPr>
+      <p:grpSpPr>
+        <a:xfrm>
+          <a:off x="0" y="0"/>
+          <a:ext cx="0" cy="0"/>
+          <a:chOff x="0" y="0"/>
+          <a:chExt cx="0" cy="0"/>
+        </a:xfrm>
+      </p:grpSpPr>
+      <p:pic>
+        <p:nvPicPr>
+          <p:cNvPr id="3" name="그림 2">
+            <a:extLst>
+              <a:ext uri="{FF2B5EF4-FFF2-40B4-BE49-F238E27FC236}">
+                <a16:creationId xmlns:a16="http://schemas.microsoft.com/office/drawing/2014/main" id="{49CF1EE6-902A-702E-43BE-5A3A1F597FF1}"/>
+              </a:ext>
+            </a:extLst>
+          </p:cNvPr>
+          <p:cNvPicPr>
+            <a:picLocks noChangeAspect="1"/>
+          </p:cNvPicPr>
+          <p:nvPr/>
+        </p:nvPicPr>
+        <p:blipFill>
+          <a:blip r:embed="rId2"/>
+          <a:stretch>
+            <a:fillRect/>
+          </a:stretch>
+        </p:blipFill>
+        <p:spPr>
+          <a:xfrm>
+            <a:off x="588142" y="1082682"/>
+            <a:ext cx="5268060" cy="4448796"/>
+          </a:xfrm>
+          <a:prstGeom prst="rect">
+            <a:avLst/>
+          </a:prstGeom>
+        </p:spPr>
+      </p:pic>
+      <p:pic>
+        <p:nvPicPr>
+          <p:cNvPr id="6" name="그림 5">
+            <a:extLst>
+              <a:ext uri="{FF2B5EF4-FFF2-40B4-BE49-F238E27FC236}">
+                <a16:creationId xmlns:a16="http://schemas.microsoft.com/office/drawing/2014/main" id="{AB4D01B8-9404-67FA-FF1E-338515554EFB}"/>
+              </a:ext>
+            </a:extLst>
+          </p:cNvPr>
+          <p:cNvPicPr>
+            <a:picLocks noChangeAspect="1"/>
+          </p:cNvPicPr>
+          <p:nvPr/>
+        </p:nvPicPr>
+        <p:blipFill>
+          <a:blip r:embed="rId3"/>
+          <a:stretch>
+            <a:fillRect/>
+          </a:stretch>
+        </p:blipFill>
+        <p:spPr>
+          <a:xfrm>
+            <a:off x="6219645" y="982655"/>
+            <a:ext cx="4525006" cy="4648849"/>
+          </a:xfrm>
+          <a:prstGeom prst="rect">
+            <a:avLst/>
+          </a:prstGeom>
+        </p:spPr>
+      </p:pic>
+    </p:spTree>
+    <p:extLst>
+      <p:ext uri="{BB962C8B-B14F-4D97-AF65-F5344CB8AC3E}">
+        <p14:creationId xmlns:p14="http://schemas.microsoft.com/office/powerpoint/2010/main" val="11764778"/>
+      </p:ext>
+    </p:extLst>
+  </p:cSld>
+  <p:clrMapOvr>
+    <a:masterClrMapping/>
+  </p:clrMapOvr>
+</p:sld>
+</file>
+
+<file path=ppt/slides/slide5.xml><?xml version="1.0" encoding="utf-8"?>
+<p:sld xmlns:a="http://schemas.openxmlformats.org/drawingml/2006/main" xmlns:r="http://schemas.openxmlformats.org/officeDocument/2006/relationships" xmlns:p="http://schemas.openxmlformats.org/presentationml/2006/main">
+  <p:cSld>
+    <p:spTree>
+      <p:nvGrpSpPr>
+        <p:cNvPr id="1" name=""/>
+        <p:cNvGrpSpPr/>
+        <p:nvPr/>
+      </p:nvGrpSpPr>
+      <p:grpSpPr>
+        <a:xfrm>
+          <a:off x="0" y="0"/>
+          <a:ext cx="0" cy="0"/>
+          <a:chOff x="0" y="0"/>
+          <a:chExt cx="0" cy="0"/>
+        </a:xfrm>
+      </p:grpSpPr>
+      <p:pic>
+        <p:nvPicPr>
+          <p:cNvPr id="4" name="그림 3">
+            <a:extLst>
+              <a:ext uri="{FF2B5EF4-FFF2-40B4-BE49-F238E27FC236}">
+                <a16:creationId xmlns:a16="http://schemas.microsoft.com/office/drawing/2014/main" id="{014F608C-4468-7C9B-97B9-54A13FE552D0}"/>
+              </a:ext>
+            </a:extLst>
+          </p:cNvPr>
+          <p:cNvPicPr>
+            <a:picLocks noChangeAspect="1"/>
+          </p:cNvPicPr>
+          <p:nvPr/>
+        </p:nvPicPr>
+        <p:blipFill>
+          <a:blip r:embed="rId2"/>
+          <a:stretch>
+            <a:fillRect/>
+          </a:stretch>
+        </p:blipFill>
+        <p:spPr>
+          <a:xfrm>
+            <a:off x="437785" y="902499"/>
+            <a:ext cx="5220429" cy="4791744"/>
+          </a:xfrm>
+          <a:prstGeom prst="rect">
+            <a:avLst/>
+          </a:prstGeom>
+        </p:spPr>
+      </p:pic>
+      <p:pic>
+        <p:nvPicPr>
+          <p:cNvPr id="7" name="그림 6">
+            <a:extLst>
+              <a:ext uri="{FF2B5EF4-FFF2-40B4-BE49-F238E27FC236}">
+                <a16:creationId xmlns:a16="http://schemas.microsoft.com/office/drawing/2014/main" id="{8A714802-BBF5-E24A-1D16-F5A9EF83DA14}"/>
+              </a:ext>
+            </a:extLst>
+          </p:cNvPr>
+          <p:cNvPicPr>
+            <a:picLocks noChangeAspect="1"/>
+          </p:cNvPicPr>
+          <p:nvPr/>
+        </p:nvPicPr>
+        <p:blipFill>
+          <a:blip r:embed="rId3"/>
+          <a:stretch>
+            <a:fillRect/>
+          </a:stretch>
+        </p:blipFill>
+        <p:spPr>
+          <a:xfrm>
+            <a:off x="6374621" y="902499"/>
+            <a:ext cx="4667901" cy="4572638"/>
+          </a:xfrm>
+          <a:prstGeom prst="rect">
+            <a:avLst/>
+          </a:prstGeom>
+        </p:spPr>
+      </p:pic>
+    </p:spTree>
+    <p:extLst>
+      <p:ext uri="{BB962C8B-B14F-4D97-AF65-F5344CB8AC3E}">
+        <p14:creationId xmlns:p14="http://schemas.microsoft.com/office/powerpoint/2010/main" val="2086371711"/>
+      </p:ext>
+    </p:extLst>
+  </p:cSld>
+  <p:clrMapOvr>
+    <a:masterClrMapping/>
+  </p:clrMapOvr>
+</p:sld>
+</file>
+
 <file path=ppt/theme/theme1.xml><?xml version="1.0" encoding="utf-8"?>
 <a:theme xmlns:a="http://schemas.openxmlformats.org/drawingml/2006/main" name="Office 테마">
   <a:themeElements>
